--- a/Tinubu_PMO_PitchDeck.pptx
+++ b/Tinubu_PMO_PitchDeck.pptx
@@ -1428,7 +1428,7 @@
                 <a:ea typeface="Inter" pitchFamily="34" charset="-122"/>
                 <a:cs typeface="Inter" pitchFamily="34" charset="-120"/>
               </a:rPr>
-              <a:t>Platform</a:t>
+              <a:t>Platform v3.0</a:t>
             </a:r>
             <a:endParaRPr lang="en-US" sz="5200" dirty="0"/>
           </a:p>
@@ -1472,7 +1472,7 @@
                 <a:ea typeface="Inter" pitchFamily="34" charset="-122"/>
                 <a:cs typeface="Inter" pitchFamily="34" charset="-120"/>
               </a:rPr>
-              <a:t>Transform monthly Zoho exports into real-time</a:t>
+              <a:t>Transform Zoho exports into real-time workforce analytics,</a:t>
             </a:r>
             <a:endParaRPr lang="en-US" sz="1600" dirty="0"/>
           </a:p>
@@ -1494,7 +1494,7 @@
                 <a:ea typeface="Inter" pitchFamily="34" charset="-122"/>
                 <a:cs typeface="Inter" pitchFamily="34" charset="-120"/>
               </a:rPr>
-              <a:t>workforce analytics, compliance tracking, and predictive insights.</a:t>
+              <a:t>squad-based views, attendance grids, and compliance tracking.</a:t>
             </a:r>
             <a:endParaRPr lang="en-US" sz="1600" dirty="0"/>
           </a:p>
@@ -1533,7 +1533,7 @@
                 <a:ea typeface="Inter" pitchFamily="34" charset="-122"/>
                 <a:cs typeface="Inter" pitchFamily="34" charset="-120"/>
               </a:rPr>
-              <a:t>18</a:t>
+              <a:t>30+</a:t>
             </a:r>
             <a:endParaRPr lang="en-US" sz="3600" dirty="0"/>
           </a:p>
@@ -1613,7 +1613,7 @@
                 <a:ea typeface="Inter" pitchFamily="34" charset="-122"/>
                 <a:cs typeface="Inter" pitchFamily="34" charset="-120"/>
               </a:rPr>
-              <a:t>6</a:t>
+              <a:t>19</a:t>
             </a:r>
             <a:endParaRPr lang="en-US" sz="3600" dirty="0"/>
           </a:p>
@@ -1654,7 +1654,7 @@
                 <a:ea typeface="Inter" pitchFamily="34" charset="-122"/>
                 <a:cs typeface="Inter" pitchFamily="34" charset="-120"/>
               </a:rPr>
-              <a:t>Legal Entities</a:t>
+              <a:t>Squad Projects</a:t>
             </a:r>
             <a:endParaRPr lang="en-US" sz="1000" dirty="0"/>
           </a:p>
@@ -2445,7 +2445,7 @@
                 <a:ea typeface="Inter" pitchFamily="34" charset="-122"/>
                 <a:cs typeface="Inter" pitchFamily="34" charset="-120"/>
               </a:rPr>
-              <a:t>Multi-Entity Blindspot</a:t>
+              <a:t>No Squad-Level View</a:t>
             </a:r>
             <a:endParaRPr lang="en-US" sz="1300" dirty="0"/>
           </a:p>
@@ -2487,7 +2487,7 @@
                 <a:ea typeface="Inter" pitchFamily="34" charset="-122"/>
                 <a:cs typeface="Inter" pitchFamily="34" charset="-120"/>
               </a:rPr>
-              <a:t>6 legal entities across 9 locations — no single view of who is billing what, where.</a:t>
+              <a:t>19 project squads across 4 locations — no single view of who is allocated where.</a:t>
             </a:r>
             <a:endParaRPr lang="en-US" sz="1050" dirty="0"/>
           </a:p>
@@ -2654,7 +2654,7 @@
                 <a:ea typeface="Inter" pitchFamily="34" charset="-122"/>
                 <a:cs typeface="Inter" pitchFamily="34" charset="-120"/>
               </a:rPr>
-              <a:t>19% of timesheets are unapproved. Finance can't bill what isn't approved.</a:t>
+              <a:t>Missed timesheets are invisible. Finance can't bill what isn't tracked.</a:t>
             </a:r>
             <a:endParaRPr lang="en-US" sz="1050" dirty="0"/>
           </a:p>
@@ -3098,7 +3098,7 @@
                 <a:ea typeface="Inter" pitchFamily="34" charset="-122"/>
                 <a:cs typeface="Inter" pitchFamily="34" charset="-120"/>
               </a:rPr>
-              <a:t>Upload two files. Get everything.</a:t>
+              <a:t>Upload three files. Get everything.</a:t>
             </a:r>
             <a:endParaRPr lang="en-US" sz="3600" dirty="0"/>
           </a:p>
@@ -3113,11 +3113,11 @@
         <p:spPr>
           <a:xfrm>
             <a:off x="731520" y="1737360"/>
-            <a:ext cx="2377440" cy="1280160"/>
+            <a:ext cx="2377440" cy="1371600"/>
           </a:xfrm>
           <a:prstGeom prst="roundRect">
             <a:avLst>
-              <a:gd name="adj" fmla="val 8571"/>
+              <a:gd name="adj" fmla="val 8000"/>
             </a:avLst>
           </a:prstGeom>
           <a:solidFill>
@@ -3242,7 +3242,7 @@
         <p:spPr>
           <a:xfrm>
             <a:off x="731520" y="2926080"/>
-            <a:ext cx="2377440" cy="457200"/>
+            <a:ext cx="2377440" cy="548640"/>
           </a:xfrm>
           <a:prstGeom prst="rect">
             <a:avLst/>
@@ -3269,7 +3269,7 @@
                 <a:ea typeface="Inter" pitchFamily="34" charset="-122"/>
                 <a:cs typeface="Inter" pitchFamily="34" charset="-120"/>
               </a:rPr>
-              <a:t>2 Excel files</a:t>
+              <a:t>3 Excel files</a:t>
             </a:r>
             <a:endParaRPr lang="en-US" sz="1000" dirty="0"/>
           </a:p>
@@ -3289,7 +3289,27 @@
                 <a:ea typeface="Inter" pitchFamily="34" charset="-122"/>
                 <a:cs typeface="Inter" pitchFamily="34" charset="-120"/>
               </a:rPr>
-              <a:t>per month</a:t>
+              <a:t>(Timelog, Attendance,</a:t>
+            </a:r>
+            <a:endParaRPr lang="en-US" sz="1000" dirty="0"/>
+          </a:p>
+          <a:p>
+            <a:pPr algn="ctr" indent="0" marL="0">
+              <a:lnSpc>
+                <a:spcPct val="120000"/>
+              </a:lnSpc>
+              <a:buNone/>
+            </a:pPr>
+            <a:r>
+              <a:rPr lang="en-US" sz="1000" dirty="0">
+                <a:solidFill>
+                  <a:srgbClr val="737686"/>
+                </a:solidFill>
+                <a:latin typeface="Inter" pitchFamily="34" charset="0"/>
+                <a:ea typeface="Inter" pitchFamily="34" charset="-122"/>
+                <a:cs typeface="Inter" pitchFamily="34" charset="-120"/>
+              </a:rPr>
+              <a:t>Demand Capacity)</a:t>
             </a:r>
             <a:endParaRPr lang="en-US" sz="1000" dirty="0"/>
           </a:p>
@@ -3343,11 +3363,11 @@
         <p:spPr>
           <a:xfrm>
             <a:off x="3611880" y="1737360"/>
-            <a:ext cx="2377440" cy="1280160"/>
+            <a:ext cx="2377440" cy="1371600"/>
           </a:xfrm>
           <a:prstGeom prst="roundRect">
             <a:avLst>
-              <a:gd name="adj" fmla="val 8571"/>
+              <a:gd name="adj" fmla="val 8000"/>
             </a:avLst>
           </a:prstGeom>
           <a:solidFill>
@@ -3472,7 +3492,7 @@
         <p:spPr>
           <a:xfrm>
             <a:off x="3611880" y="2926080"/>
-            <a:ext cx="2377440" cy="457200"/>
+            <a:ext cx="2377440" cy="548640"/>
           </a:xfrm>
           <a:prstGeom prst="rect">
             <a:avLst/>
@@ -3573,11 +3593,11 @@
         <p:spPr>
           <a:xfrm>
             <a:off x="6492240" y="1737360"/>
-            <a:ext cx="2377440" cy="1280160"/>
+            <a:ext cx="2377440" cy="1371600"/>
           </a:xfrm>
           <a:prstGeom prst="roundRect">
             <a:avLst>
-              <a:gd name="adj" fmla="val 8571"/>
+              <a:gd name="adj" fmla="val 8000"/>
             </a:avLst>
           </a:prstGeom>
           <a:solidFill>
@@ -3702,7 +3722,7 @@
         <p:spPr>
           <a:xfrm>
             <a:off x="6492240" y="2926080"/>
-            <a:ext cx="2377440" cy="457200"/>
+            <a:ext cx="2377440" cy="548640"/>
           </a:xfrm>
           <a:prstGeom prst="rect">
             <a:avLst/>
@@ -3749,7 +3769,7 @@
                 <a:ea typeface="Inter" pitchFamily="34" charset="-122"/>
                 <a:cs typeface="Inter" pitchFamily="34" charset="-120"/>
               </a:rPr>
-              <a:t>&amp; store</a:t>
+              <a:t>Skye exclusion</a:t>
             </a:r>
             <a:endParaRPr lang="en-US" sz="1000" dirty="0"/>
           </a:p>
@@ -3803,11 +3823,11 @@
         <p:spPr>
           <a:xfrm>
             <a:off x="9372600" y="1737360"/>
-            <a:ext cx="2377440" cy="1280160"/>
+            <a:ext cx="2377440" cy="1371600"/>
           </a:xfrm>
           <a:prstGeom prst="roundRect">
             <a:avLst>
-              <a:gd name="adj" fmla="val 8571"/>
+              <a:gd name="adj" fmla="val 8000"/>
             </a:avLst>
           </a:prstGeom>
           <a:solidFill>
@@ -3932,7 +3952,7 @@
         <p:spPr>
           <a:xfrm>
             <a:off x="9372600" y="2926080"/>
-            <a:ext cx="2377440" cy="457200"/>
+            <a:ext cx="2377440" cy="548640"/>
           </a:xfrm>
           <a:prstGeom prst="rect">
             <a:avLst/>
@@ -3959,7 +3979,7 @@
                 <a:ea typeface="Inter" pitchFamily="34" charset="-122"/>
                 <a:cs typeface="Inter" pitchFamily="34" charset="-120"/>
               </a:rPr>
-              <a:t>18 analytics</a:t>
+              <a:t>30+ analytics</a:t>
             </a:r>
             <a:endParaRPr lang="en-US" sz="1000" dirty="0"/>
           </a:p>
@@ -3979,7 +3999,7 @@
                 <a:ea typeface="Inter" pitchFamily="34" charset="-122"/>
                 <a:cs typeface="Inter" pitchFamily="34" charset="-120"/>
               </a:rPr>
-              <a:t>features</a:t>
+              <a:t>Dept/Squad toggle</a:t>
             </a:r>
             <a:endParaRPr lang="en-US" sz="1000" dirty="0"/>
           </a:p>
@@ -3993,7 +4013,7 @@
         </p:nvSpPr>
         <p:spPr>
           <a:xfrm>
-            <a:off x="731520" y="3840480"/>
+            <a:off x="731520" y="4023360"/>
             <a:ext cx="2560320" cy="1188720"/>
           </a:xfrm>
           <a:prstGeom prst="roundRect">
@@ -4020,7 +4040,7 @@
         </p:nvSpPr>
         <p:spPr>
           <a:xfrm>
-            <a:off x="868680" y="3950208"/>
+            <a:off x="868680" y="4133088"/>
             <a:ext cx="1097280" cy="201168"/>
           </a:xfrm>
           <a:prstGeom prst="rect">
@@ -4045,7 +4065,7 @@
                 <a:ea typeface="Inter" pitchFamily="34" charset="-122"/>
                 <a:cs typeface="Inter" pitchFamily="34" charset="-120"/>
               </a:rPr>
-              <a:t>OVERVIEW</a:t>
+              <a:t>PORTFOLIO</a:t>
             </a:r>
             <a:endParaRPr lang="en-US" sz="700" dirty="0"/>
           </a:p>
@@ -4059,7 +4079,7 @@
         </p:nvSpPr>
         <p:spPr>
           <a:xfrm>
-            <a:off x="868680" y="4206240"/>
+            <a:off x="868680" y="4389120"/>
             <a:ext cx="2286000" cy="274320"/>
           </a:xfrm>
           <a:prstGeom prst="rect">
@@ -4084,7 +4104,7 @@
                 <a:ea typeface="Inter" pitchFamily="34" charset="-122"/>
                 <a:cs typeface="Inter" pitchFamily="34" charset="-120"/>
               </a:rPr>
-              <a:t>Executive KPIs</a:t>
+              <a:t>Portfolio KPIs</a:t>
             </a:r>
             <a:endParaRPr lang="en-US" sz="1200" dirty="0"/>
           </a:p>
@@ -4098,7 +4118,7 @@
         </p:nvSpPr>
         <p:spPr>
           <a:xfrm>
-            <a:off x="868680" y="4526280"/>
+            <a:off x="868680" y="4709160"/>
             <a:ext cx="2286000" cy="365760"/>
           </a:xfrm>
           <a:prstGeom prst="rect">
@@ -4126,7 +4146,7 @@
                 <a:ea typeface="Inter" pitchFamily="34" charset="-122"/>
                 <a:cs typeface="Inter" pitchFamily="34" charset="-120"/>
               </a:rPr>
-              <a:t>MoM trends with sparklines and color-coded thresholds</a:t>
+              <a:t>MoM trends, sparklines, Approval %, designation chart</a:t>
             </a:r>
             <a:endParaRPr lang="en-US" sz="950" dirty="0"/>
           </a:p>
@@ -4140,7 +4160,7 @@
         </p:nvSpPr>
         <p:spPr>
           <a:xfrm>
-            <a:off x="3611880" y="3840480"/>
+            <a:off x="3611880" y="4023360"/>
             <a:ext cx="2560320" cy="1188720"/>
           </a:xfrm>
           <a:prstGeom prst="roundRect">
@@ -4167,7 +4187,7 @@
         </p:nvSpPr>
         <p:spPr>
           <a:xfrm>
-            <a:off x="3749040" y="3950208"/>
+            <a:off x="3749040" y="4133088"/>
             <a:ext cx="1097280" cy="201168"/>
           </a:xfrm>
           <a:prstGeom prst="rect">
@@ -4206,7 +4226,7 @@
         </p:nvSpPr>
         <p:spPr>
           <a:xfrm>
-            <a:off x="3749040" y="4206240"/>
+            <a:off x="3749040" y="4389120"/>
             <a:ext cx="2286000" cy="274320"/>
           </a:xfrm>
           <a:prstGeom prst="rect">
@@ -4231,7 +4251,7 @@
                 <a:ea typeface="Inter" pitchFamily="34" charset="-122"/>
                 <a:cs typeface="Inter" pitchFamily="34" charset="-120"/>
               </a:rPr>
-              <a:t>Resource Roster</a:t>
+              <a:t>Squad Allocation</a:t>
             </a:r>
             <a:endParaRPr lang="en-US" sz="1200" dirty="0"/>
           </a:p>
@@ -4245,7 +4265,7 @@
         </p:nvSpPr>
         <p:spPr>
           <a:xfrm>
-            <a:off x="3749040" y="4526280"/>
+            <a:off x="3749040" y="4709160"/>
             <a:ext cx="2286000" cy="365760"/>
           </a:xfrm>
           <a:prstGeom prst="rect">
@@ -4273,7 +4293,7 @@
                 <a:ea typeface="Inter" pitchFamily="34" charset="-122"/>
                 <a:cs typeface="Inter" pitchFamily="34" charset="-120"/>
               </a:rPr>
-              <a:t>Multi-month per-employee grid with CSV export</a:t>
+              <a:t>Project-based squads with billable/non-billable split</a:t>
             </a:r>
             <a:endParaRPr lang="en-US" sz="950" dirty="0"/>
           </a:p>
@@ -4287,7 +4307,7 @@
         </p:nvSpPr>
         <p:spPr>
           <a:xfrm>
-            <a:off x="6492240" y="3840480"/>
+            <a:off x="6492240" y="4023360"/>
             <a:ext cx="2560320" cy="1188720"/>
           </a:xfrm>
           <a:prstGeom prst="roundRect">
@@ -4314,7 +4334,7 @@
         </p:nvSpPr>
         <p:spPr>
           <a:xfrm>
-            <a:off x="6629400" y="3950208"/>
+            <a:off x="6629400" y="4133088"/>
             <a:ext cx="1097280" cy="201168"/>
           </a:xfrm>
           <a:prstGeom prst="rect">
@@ -4339,7 +4359,7 @@
                 <a:ea typeface="Inter" pitchFamily="34" charset="-122"/>
                 <a:cs typeface="Inter" pitchFamily="34" charset="-120"/>
               </a:rPr>
-              <a:t>UTILIZATION</a:t>
+              <a:t>TIMESHEET</a:t>
             </a:r>
             <a:endParaRPr lang="en-US" sz="700" dirty="0"/>
           </a:p>
@@ -4353,7 +4373,7 @@
         </p:nvSpPr>
         <p:spPr>
           <a:xfrm>
-            <a:off x="6629400" y="4206240"/>
+            <a:off x="6629400" y="4389120"/>
             <a:ext cx="2286000" cy="274320"/>
           </a:xfrm>
           <a:prstGeom prst="rect">
@@ -4378,7 +4398,7 @@
                 <a:ea typeface="Inter" pitchFamily="34" charset="-122"/>
                 <a:cs typeface="Inter" pitchFamily="34" charset="-120"/>
               </a:rPr>
-              <a:t>Compliance Funnel</a:t>
+              <a:t>Attendance Grid</a:t>
             </a:r>
             <a:endParaRPr lang="en-US" sz="1200" dirty="0"/>
           </a:p>
@@ -4392,7 +4412,7 @@
         </p:nvSpPr>
         <p:spPr>
           <a:xfrm>
-            <a:off x="6629400" y="4526280"/>
+            <a:off x="6629400" y="4709160"/>
             <a:ext cx="2286000" cy="365760"/>
           </a:xfrm>
           <a:prstGeom prst="rect">
@@ -4420,7 +4440,7 @@
                 <a:ea typeface="Inter" pitchFamily="34" charset="-122"/>
                 <a:cs typeface="Inter" pitchFamily="34" charset="-120"/>
               </a:rPr>
-              <a:t>Approval rates tracked across periods</a:t>
+              <a:t>Employee x day grid with color-coded status cells</a:t>
             </a:r>
             <a:endParaRPr lang="en-US" sz="950" dirty="0"/>
           </a:p>
@@ -4434,7 +4454,7 @@
         </p:nvSpPr>
         <p:spPr>
           <a:xfrm>
-            <a:off x="9372600" y="3840480"/>
+            <a:off x="9372600" y="4023360"/>
             <a:ext cx="2560320" cy="1188720"/>
           </a:xfrm>
           <a:prstGeom prst="roundRect">
@@ -4461,7 +4481,7 @@
         </p:nvSpPr>
         <p:spPr>
           <a:xfrm>
-            <a:off x="9509760" y="3950208"/>
+            <a:off x="9509760" y="4133088"/>
             <a:ext cx="1097280" cy="201168"/>
           </a:xfrm>
           <a:prstGeom prst="rect">
@@ -4486,7 +4506,7 @@
                 <a:ea typeface="Inter" pitchFamily="34" charset="-122"/>
                 <a:cs typeface="Inter" pitchFamily="34" charset="-120"/>
               </a:rPr>
-              <a:t>UTILIZATION</a:t>
+              <a:t>TIMESHEET</a:t>
             </a:r>
             <a:endParaRPr lang="en-US" sz="700" dirty="0"/>
           </a:p>
@@ -4500,7 +4520,7 @@
         </p:nvSpPr>
         <p:spPr>
           <a:xfrm>
-            <a:off x="9509760" y="4206240"/>
+            <a:off x="9509760" y="4389120"/>
             <a:ext cx="2286000" cy="274320"/>
           </a:xfrm>
           <a:prstGeom prst="rect">
@@ -4525,7 +4545,7 @@
                 <a:ea typeface="Inter" pitchFamily="34" charset="-122"/>
                 <a:cs typeface="Inter" pitchFamily="34" charset="-120"/>
               </a:rPr>
-              <a:t>Dept Heatmap</a:t>
+              <a:t>Compliance Tracker</a:t>
             </a:r>
             <a:endParaRPr lang="en-US" sz="1200" dirty="0"/>
           </a:p>
@@ -4539,7 +4559,7 @@
         </p:nvSpPr>
         <p:spPr>
           <a:xfrm>
-            <a:off x="9509760" y="4526280"/>
+            <a:off x="9509760" y="4709160"/>
             <a:ext cx="2286000" cy="365760"/>
           </a:xfrm>
           <a:prstGeom prst="rect">
@@ -4567,7 +4587,7 @@
                 <a:ea typeface="Inter" pitchFamily="34" charset="-122"/>
                 <a:cs typeface="Inter" pitchFamily="34" charset="-120"/>
               </a:rPr>
-              <a:t>Cross-month utilization % by department</a:t>
+              <a:t>Per-employee missed timesheet days report</a:t>
             </a:r>
             <a:endParaRPr lang="en-US" sz="950" dirty="0"/>
           </a:p>
@@ -4581,7 +4601,7 @@
         </p:nvSpPr>
         <p:spPr>
           <a:xfrm>
-            <a:off x="731520" y="5303520"/>
+            <a:off x="731520" y="5486400"/>
             <a:ext cx="2560320" cy="1188720"/>
           </a:xfrm>
           <a:prstGeom prst="roundRect">
@@ -4608,7 +4628,7 @@
         </p:nvSpPr>
         <p:spPr>
           <a:xfrm>
-            <a:off x="868680" y="5413248"/>
+            <a:off x="868680" y="5596128"/>
             <a:ext cx="1097280" cy="201168"/>
           </a:xfrm>
           <a:prstGeom prst="rect">
@@ -4633,7 +4653,7 @@
                 <a:ea typeface="Inter" pitchFamily="34" charset="-122"/>
                 <a:cs typeface="Inter" pitchFamily="34" charset="-120"/>
               </a:rPr>
-              <a:t>ANALYTICS</a:t>
+              <a:t>RESOURCES</a:t>
             </a:r>
             <a:endParaRPr lang="en-US" sz="700" dirty="0"/>
           </a:p>
@@ -4647,7 +4667,7 @@
         </p:nvSpPr>
         <p:spPr>
           <a:xfrm>
-            <a:off x="868680" y="5669280"/>
+            <a:off x="868680" y="5852160"/>
             <a:ext cx="2286000" cy="274320"/>
           </a:xfrm>
           <a:prstGeom prst="rect">
@@ -4672,7 +4692,7 @@
                 <a:ea typeface="Inter" pitchFamily="34" charset="-122"/>
                 <a:cs typeface="Inter" pitchFamily="34" charset="-120"/>
               </a:rPr>
-              <a:t>Entity Billing</a:t>
+              <a:t>Heatmap Roster</a:t>
             </a:r>
             <a:endParaRPr lang="en-US" sz="1200" dirty="0"/>
           </a:p>
@@ -4686,7 +4706,7 @@
         </p:nvSpPr>
         <p:spPr>
           <a:xfrm>
-            <a:off x="868680" y="5989320"/>
+            <a:off x="868680" y="6172200"/>
             <a:ext cx="2286000" cy="365760"/>
           </a:xfrm>
           <a:prstGeom prst="rect">
@@ -4714,7 +4734,7 @@
                 <a:ea typeface="Inter" pitchFamily="34" charset="-122"/>
                 <a:cs typeface="Inter" pitchFamily="34" charset="-120"/>
               </a:rPr>
-              <a:t>Billability comparison across 6 legal entities</a:t>
+              <a:t>Multi-month hours with 5-tier color scale</a:t>
             </a:r>
             <a:endParaRPr lang="en-US" sz="950" dirty="0"/>
           </a:p>
@@ -4728,7 +4748,7 @@
         </p:nvSpPr>
         <p:spPr>
           <a:xfrm>
-            <a:off x="3611880" y="5303520"/>
+            <a:off x="3611880" y="5486400"/>
             <a:ext cx="2560320" cy="1188720"/>
           </a:xfrm>
           <a:prstGeom prst="roundRect">
@@ -4755,7 +4775,7 @@
         </p:nvSpPr>
         <p:spPr>
           <a:xfrm>
-            <a:off x="3749040" y="5413248"/>
+            <a:off x="3749040" y="5596128"/>
             <a:ext cx="1097280" cy="201168"/>
           </a:xfrm>
           <a:prstGeom prst="rect">
@@ -4780,7 +4800,7 @@
                 <a:ea typeface="Inter" pitchFamily="34" charset="-122"/>
                 <a:cs typeface="Inter" pitchFamily="34" charset="-120"/>
               </a:rPr>
-              <a:t>OVERVIEW</a:t>
+              <a:t>PORTFOLIO</a:t>
             </a:r>
             <a:endParaRPr lang="en-US" sz="700" dirty="0"/>
           </a:p>
@@ -4794,7 +4814,7 @@
         </p:nvSpPr>
         <p:spPr>
           <a:xfrm>
-            <a:off x="3749040" y="5669280"/>
+            <a:off x="3749040" y="5852160"/>
             <a:ext cx="2286000" cy="274320"/>
           </a:xfrm>
           <a:prstGeom prst="rect">
@@ -4833,7 +4853,7 @@
         </p:nvSpPr>
         <p:spPr>
           <a:xfrm>
-            <a:off x="3749040" y="5989320"/>
+            <a:off x="3749040" y="6172200"/>
             <a:ext cx="2286000" cy="365760"/>
           </a:xfrm>
           <a:prstGeom prst="rect">
@@ -4875,7 +4895,7 @@
         </p:nvSpPr>
         <p:spPr>
           <a:xfrm>
-            <a:off x="6492240" y="5303520"/>
+            <a:off x="6492240" y="5486400"/>
             <a:ext cx="2560320" cy="1188720"/>
           </a:xfrm>
           <a:prstGeom prst="roundRect">
@@ -4902,7 +4922,7 @@
         </p:nvSpPr>
         <p:spPr>
           <a:xfrm>
-            <a:off x="6629400" y="5413248"/>
+            <a:off x="6629400" y="5596128"/>
             <a:ext cx="1097280" cy="201168"/>
           </a:xfrm>
           <a:prstGeom prst="rect">
@@ -4941,7 +4961,7 @@
         </p:nvSpPr>
         <p:spPr>
           <a:xfrm>
-            <a:off x="6629400" y="5669280"/>
+            <a:off x="6629400" y="5852160"/>
             <a:ext cx="2286000" cy="274320"/>
           </a:xfrm>
           <a:prstGeom prst="rect">
@@ -4980,7 +5000,7 @@
         </p:nvSpPr>
         <p:spPr>
           <a:xfrm>
-            <a:off x="6629400" y="5989320"/>
+            <a:off x="6629400" y="6172200"/>
             <a:ext cx="2286000" cy="365760"/>
           </a:xfrm>
           <a:prstGeom prst="rect">
@@ -5022,7 +5042,7 @@
         </p:nvSpPr>
         <p:spPr>
           <a:xfrm>
-            <a:off x="9372600" y="5303520"/>
+            <a:off x="9372600" y="5486400"/>
             <a:ext cx="2560320" cy="1188720"/>
           </a:xfrm>
           <a:prstGeom prst="roundRect">
@@ -5049,7 +5069,7 @@
         </p:nvSpPr>
         <p:spPr>
           <a:xfrm>
-            <a:off x="9509760" y="5413248"/>
+            <a:off x="9509760" y="5596128"/>
             <a:ext cx="1097280" cy="201168"/>
           </a:xfrm>
           <a:prstGeom prst="rect">
@@ -5074,7 +5094,7 @@
                 <a:ea typeface="Inter" pitchFamily="34" charset="-122"/>
                 <a:cs typeface="Inter" pitchFamily="34" charset="-120"/>
               </a:rPr>
-              <a:t>PREDICTIVE</a:t>
+              <a:t>GLOBAL</a:t>
             </a:r>
             <a:endParaRPr lang="en-US" sz="700" dirty="0"/>
           </a:p>
@@ -5088,7 +5108,7 @@
         </p:nvSpPr>
         <p:spPr>
           <a:xfrm>
-            <a:off x="9509760" y="5669280"/>
+            <a:off x="9509760" y="5852160"/>
             <a:ext cx="2286000" cy="274320"/>
           </a:xfrm>
           <a:prstGeom prst="rect">
@@ -5113,7 +5133,7 @@
                 <a:ea typeface="Inter" pitchFamily="34" charset="-122"/>
                 <a:cs typeface="Inter" pitchFamily="34" charset="-120"/>
               </a:rPr>
-              <a:t>Capacity Forecast</a:t>
+              <a:t>Dept/Squad Toggle</a:t>
             </a:r>
             <a:endParaRPr lang="en-US" sz="1200" dirty="0"/>
           </a:p>
@@ -5127,7 +5147,7 @@
         </p:nvSpPr>
         <p:spPr>
           <a:xfrm>
-            <a:off x="9509760" y="5989320"/>
+            <a:off x="9509760" y="6172200"/>
             <a:ext cx="2286000" cy="365760"/>
           </a:xfrm>
           <a:prstGeom prst="rect">
@@ -5155,7 +5175,7 @@
                 <a:ea typeface="Inter" pitchFamily="34" charset="-122"/>
                 <a:cs typeface="Inter" pitchFamily="34" charset="-120"/>
               </a:rPr>
-              <a:t>Linear projection of next month's hours</a:t>
+              <a:t>Global switch between department and squad views</a:t>
             </a:r>
             <a:endParaRPr lang="en-US" sz="950" dirty="0"/>
           </a:p>
@@ -5475,7 +5495,7 @@
                 <a:ea typeface="Inter" pitchFamily="34" charset="-122"/>
                 <a:cs typeface="Inter" pitchFamily="34" charset="-120"/>
               </a:rPr>
-              <a:t>81%</a:t>
+              <a:t>19</a:t>
             </a:r>
             <a:endParaRPr lang="en-US" sz="4800" dirty="0"/>
           </a:p>
@@ -5514,7 +5534,7 @@
                 <a:ea typeface="Inter" pitchFamily="34" charset="-122"/>
                 <a:cs typeface="Inter" pitchFamily="34" charset="-120"/>
               </a:rPr>
-              <a:t>Compliance Visibility</a:t>
+              <a:t>Project Squads</a:t>
             </a:r>
             <a:endParaRPr lang="en-US" sz="1300" dirty="0"/>
           </a:p>
@@ -5553,7 +5573,7 @@
                 <a:ea typeface="Inter" pitchFamily="34" charset="-122"/>
                 <a:cs typeface="Inter" pitchFamily="34" charset="-120"/>
               </a:rPr>
-              <a:t>Approval rates tracked in real-time</a:t>
+              <a:t>Full squad-level visibility</a:t>
             </a:r>
             <a:endParaRPr lang="en-US" sz="1000" dirty="0"/>
           </a:p>
@@ -5619,7 +5639,7 @@
                 <a:ea typeface="Inter" pitchFamily="34" charset="-122"/>
                 <a:cs typeface="Inter" pitchFamily="34" charset="-120"/>
               </a:rPr>
-              <a:t>30+</a:t>
+              <a:t>35+</a:t>
             </a:r>
             <a:endParaRPr lang="en-US" sz="4800" dirty="0"/>
           </a:p>
@@ -5978,7 +5998,7 @@
                 <a:ea typeface="Inter" pitchFamily="34" charset="-122"/>
                 <a:cs typeface="Inter" pitchFamily="34" charset="-120"/>
               </a:rPr>
-              <a:t>One-glance executive summary with MoM trends</a:t>
+              <a:t>Portfolio summary with approval %, MoM trends, designation breakdown</a:t>
             </a:r>
             <a:endParaRPr lang="en-US" sz="1100" dirty="0"/>
           </a:p>
@@ -6076,7 +6096,7 @@
                 <a:ea typeface="Inter" pitchFamily="34" charset="-122"/>
                 <a:cs typeface="Inter" pitchFamily="34" charset="-120"/>
               </a:rPr>
-              <a:t>Alert feed + heatmaps + compliance funnel</a:t>
+              <a:t>Alert feed + squad allocation + compliance tracker + heatmaps</a:t>
             </a:r>
             <a:endParaRPr lang="en-US" sz="1100" dirty="0"/>
           </a:p>
@@ -6174,7 +6194,7 @@
                 <a:ea typeface="Inter" pitchFamily="34" charset="-122"/>
                 <a:cs typeface="Inter" pitchFamily="34" charset="-120"/>
               </a:rPr>
-              <a:t>Resource utilization + burnout risk flags</a:t>
+              <a:t>Squad-based roster with heatmap + burnout risk flags</a:t>
             </a:r>
             <a:endParaRPr lang="en-US" sz="1100" dirty="0"/>
           </a:p>
@@ -6272,7 +6292,7 @@
                 <a:ea typeface="Inter" pitchFamily="34" charset="-122"/>
                 <a:cs typeface="Inter" pitchFamily="34" charset="-120"/>
               </a:rPr>
-              <a:t>Entity billing + non-billable breakdown</a:t>
+              <a:t>Entity billing + Skye exclusion + non-billable breakdown</a:t>
             </a:r>
             <a:endParaRPr lang="en-US" sz="1100" dirty="0"/>
           </a:p>
@@ -6370,7 +6390,7 @@
                 <a:ea typeface="Inter" pitchFamily="34" charset="-122"/>
                 <a:cs typeface="Inter" pitchFamily="34" charset="-120"/>
               </a:rPr>
-              <a:t>Attendance trends + leave patterns + manager scores</a:t>
+              <a:t>Attendance grid + leave patterns + missed timesheet report</a:t>
             </a:r>
             <a:endParaRPr lang="en-US" sz="1100" dirty="0"/>
           </a:p>
@@ -6564,7 +6584,7 @@
         <p:spPr>
           <a:xfrm>
             <a:off x="731520" y="2560320"/>
-            <a:ext cx="7315200" cy="914400"/>
+            <a:ext cx="9144000" cy="914400"/>
           </a:xfrm>
           <a:prstGeom prst="roundRect">
             <a:avLst>
@@ -6649,7 +6669,7 @@
         <p:spPr>
           <a:xfrm>
             <a:off x="2194560" y="2697480"/>
-            <a:ext cx="5486400" cy="347472"/>
+            <a:ext cx="7315200" cy="347472"/>
           </a:xfrm>
           <a:prstGeom prst="rect">
             <a:avLst/>
@@ -6673,7 +6693,7 @@
                 <a:ea typeface="Inter" pitchFamily="34" charset="-122"/>
                 <a:cs typeface="Inter" pitchFamily="34" charset="-120"/>
               </a:rPr>
-              <a:t>18 analytics features • Upload versioning • Burnout detection • Leave forecast</a:t>
+              <a:t>30+ features • Squad allocation • Attendance grid • Compliance tracker • Skye exclusion • Dept/Squad toggle • Burnout detection</a:t>
             </a:r>
             <a:endParaRPr lang="en-US" sz="1100" dirty="0"/>
           </a:p>
@@ -6688,7 +6708,7 @@
         <p:spPr>
           <a:xfrm>
             <a:off x="731520" y="3749040"/>
-            <a:ext cx="7315200" cy="914400"/>
+            <a:ext cx="9144000" cy="914400"/>
           </a:xfrm>
           <a:prstGeom prst="roundRect">
             <a:avLst>
@@ -6773,7 +6793,7 @@
         <p:spPr>
           <a:xfrm>
             <a:off x="2194560" y="3886200"/>
-            <a:ext cx="5486400" cy="347472"/>
+            <a:ext cx="7315200" cy="347472"/>
           </a:xfrm>
           <a:prstGeom prst="rect">
             <a:avLst/>
@@ -6797,7 +6817,7 @@
                 <a:ea typeface="Inter" pitchFamily="34" charset="-122"/>
                 <a:cs typeface="Inter" pitchFamily="34" charset="-120"/>
               </a:rPr>
-              <a:t>User authentication • Project profitability • Dark mode • Data exports</a:t>
+              <a:t>User authentication • Project profitability • Dark mode • Data exports • SOW tracking</a:t>
             </a:r>
             <a:endParaRPr lang="en-US" sz="1100" dirty="0"/>
           </a:p>
@@ -6812,7 +6832,7 @@
         <p:spPr>
           <a:xfrm>
             <a:off x="731520" y="4937760"/>
-            <a:ext cx="7315200" cy="914400"/>
+            <a:ext cx="9144000" cy="914400"/>
           </a:xfrm>
           <a:prstGeom prst="roundRect">
             <a:avLst>
@@ -6897,7 +6917,7 @@
         <p:spPr>
           <a:xfrm>
             <a:off x="2194560" y="5074920"/>
-            <a:ext cx="5486400" cy="347472"/>
+            <a:ext cx="7315200" cy="347472"/>
           </a:xfrm>
           <a:prstGeom prst="rect">
             <a:avLst/>
@@ -6921,7 +6941,7 @@
                 <a:ea typeface="Inter" pitchFamily="34" charset="-122"/>
                 <a:cs typeface="Inter" pitchFamily="34" charset="-120"/>
               </a:rPr>
-              <a:t>Skills matrix • Resource optimizer • Automated imports • AI insights</a:t>
+              <a:t>Skills matrix • Resource optimizer • Automated imports • AI-powered insights</a:t>
             </a:r>
             <a:endParaRPr lang="en-US" sz="1100" dirty="0"/>
           </a:p>
